--- a/docs/ppt/funding/laos-funding-ppt-master.pptx
+++ b/docs/ppt/funding/laos-funding-ppt-master.pptx
@@ -360,7 +360,7 @@
             <a:pPr/>
             <a:r>
               <a:rPr lang="zh-CN" dirty="0"/>
-              <a:t>各位好，今天讲的不是一个更聪明的模型，而是给 AI Agent 补上它缺的那层操作系统。laos 是一个用户态的治理内核，一句话说清：模型负责想，laos 负责说不。这不是概念产品，右边这个环就是它的核心机制，八环系统调用闸门链。左下角三个数字都可在仓库验证：开源版本 v0.12.0，三十天发了十二个版本，七百六十五项测试全绿。接下来十四页，我会讲清楚为什么这层东西值得现在投。</a:t>
+              <a:t>各位好，今天讲的不是一个更聪明的模型，而是把 Linux 内核的治理延伸到 Agent 这个新负载——基座不变，治理延伸。laos 是一个用户态的治理内核，一句话说清：模型负责想，laos 负责说不。这不是概念产品，右边这个环就是它的核心机制，八环系统调用闸门链。左下角三个数字都可在仓库验证：开源版本 v0.12.0，三十天发了十二个版本，七百六十五项测试全绿。接下来十四页，我会讲清楚为什么这层东西值得现在投。</a:t>
             </a:r>
           </a:p>
         </p:txBody>
@@ -1836,7 +1836,7 @@
                   <a:ea typeface="+mn-ea"/>
                   <a:cs typeface="+mn-cs"/>
                 </a:rPr>
-                <a:t>给 AI Agent 装上</a:t>
+                <a:t>Linux 内核的</a:t>
               </a:r>
               <a:br>
                 <a:rPr lang="zh-CN" sz="4350" b="1" dirty="0">
@@ -1857,7 +1857,7 @@
                   <a:ea typeface="+mn-ea"/>
                   <a:cs typeface="+mn-cs"/>
                 </a:rPr>
-                <a:t>操作系统的治理内核</a:t>
+                <a:t>Agent 治理层</a:t>
               </a:r>
             </a:p>
           </p:txBody>
@@ -1898,6 +1898,10 @@
               <a:noFill/>
             </a:ln>
           </p:spPr>
+          <p:txBody>
+            <a:bodyPr/>
+            <a:p/>
+          </p:txBody>
         </p:sp>
         <p:sp>
           <p:nvSpPr>
@@ -2000,6 +2004,10 @@
               </a:solidFill>
             </a:ln>
           </p:spPr>
+          <p:txBody>
+            <a:bodyPr/>
+            <a:p/>
+          </p:txBody>
         </p:sp>
         <p:sp>
           <p:nvSpPr>
@@ -2116,6 +2124,10 @@
               </a:solidFill>
             </a:ln>
           </p:spPr>
+          <p:txBody>
+            <a:bodyPr/>
+            <a:p/>
+          </p:txBody>
         </p:sp>
         <p:sp>
           <p:nvSpPr>
@@ -2232,6 +2244,10 @@
               </a:solidFill>
             </a:ln>
           </p:spPr>
+          <p:txBody>
+            <a:bodyPr/>
+            <a:p/>
+          </p:txBody>
         </p:sp>
         <p:sp>
           <p:nvSpPr>
@@ -2404,6 +2420,10 @@
               </a:solidFill>
             </a:ln>
           </p:spPr>
+          <p:txBody>
+            <a:bodyPr/>
+            <a:p/>
+          </p:txBody>
         </p:sp>
         <p:sp>
           <p:nvSpPr>
@@ -2426,6 +2446,10 @@
               <a:noFill/>
             </a:ln>
           </p:spPr>
+          <p:txBody>
+            <a:bodyPr/>
+            <a:p/>
+          </p:txBody>
         </p:sp>
         <p:sp>
           <p:nvSpPr>
@@ -2462,6 +2486,10 @@
               </a:solidFill>
             </a:ln>
           </p:spPr>
+          <p:txBody>
+            <a:bodyPr/>
+            <a:p/>
+          </p:txBody>
         </p:sp>
         <p:sp>
           <p:nvSpPr>
@@ -2498,6 +2526,10 @@
               </a:solidFill>
             </a:ln>
           </p:spPr>
+          <p:txBody>
+            <a:bodyPr/>
+            <a:p/>
+          </p:txBody>
         </p:sp>
         <p:sp>
           <p:nvSpPr>
@@ -2534,6 +2566,10 @@
               </a:solidFill>
             </a:ln>
           </p:spPr>
+          <p:txBody>
+            <a:bodyPr/>
+            <a:p/>
+          </p:txBody>
         </p:sp>
         <p:sp>
           <p:nvSpPr>
@@ -2570,6 +2606,10 @@
               </a:solidFill>
             </a:ln>
           </p:spPr>
+          <p:txBody>
+            <a:bodyPr/>
+            <a:p/>
+          </p:txBody>
         </p:sp>
         <p:sp>
           <p:nvSpPr>
@@ -2606,6 +2646,10 @@
               </a:solidFill>
             </a:ln>
           </p:spPr>
+          <p:txBody>
+            <a:bodyPr/>
+            <a:p/>
+          </p:txBody>
         </p:sp>
         <p:sp>
           <p:nvSpPr>
@@ -2642,6 +2686,10 @@
               </a:solidFill>
             </a:ln>
           </p:spPr>
+          <p:txBody>
+            <a:bodyPr/>
+            <a:p/>
+          </p:txBody>
         </p:sp>
         <p:sp>
           <p:nvSpPr>
@@ -2666,6 +2714,10 @@
               </a:solidFill>
             </a:ln>
           </p:spPr>
+          <p:txBody>
+            <a:bodyPr/>
+            <a:p/>
+          </p:txBody>
         </p:sp>
         <p:sp>
           <p:nvSpPr>
@@ -2690,6 +2742,10 @@
               </a:solidFill>
             </a:ln>
           </p:spPr>
+          <p:txBody>
+            <a:bodyPr/>
+            <a:p/>
+          </p:txBody>
         </p:sp>
         <p:sp>
           <p:nvSpPr>
@@ -2714,6 +2770,10 @@
               </a:solidFill>
             </a:ln>
           </p:spPr>
+          <p:txBody>
+            <a:bodyPr/>
+            <a:p/>
+          </p:txBody>
         </p:sp>
         <p:sp>
           <p:nvSpPr>
@@ -2738,6 +2798,10 @@
               </a:solidFill>
             </a:ln>
           </p:spPr>
+          <p:txBody>
+            <a:bodyPr/>
+            <a:p/>
+          </p:txBody>
         </p:sp>
         <p:sp>
           <p:nvSpPr>
@@ -2762,6 +2826,10 @@
               </a:solidFill>
             </a:ln>
           </p:spPr>
+          <p:txBody>
+            <a:bodyPr/>
+            <a:p/>
+          </p:txBody>
         </p:sp>
         <p:sp>
           <p:nvSpPr>
@@ -2786,6 +2854,10 @@
               </a:solidFill>
             </a:ln>
           </p:spPr>
+          <p:txBody>
+            <a:bodyPr/>
+            <a:p/>
+          </p:txBody>
         </p:sp>
         <p:sp>
           <p:nvSpPr>
@@ -3113,6 +3185,10 @@
               </a:solidFill>
             </a:ln>
           </p:spPr>
+          <p:txBody>
+            <a:bodyPr/>
+            <a:p/>
+          </p:txBody>
         </p:sp>
       </p:grpSp>
       <p:grpSp>
@@ -3415,6 +3491,10 @@
               </a:solidFill>
             </a:ln>
           </p:spPr>
+          <p:txBody>
+            <a:bodyPr/>
+            <a:p/>
+          </p:txBody>
         </p:sp>
         <p:sp>
           <p:nvSpPr>
@@ -3596,6 +3676,10 @@
               </a:solidFill>
             </a:ln>
           </p:spPr>
+          <p:txBody>
+            <a:bodyPr/>
+            <a:p/>
+          </p:txBody>
         </p:sp>
         <p:sp>
           <p:nvSpPr>
@@ -3777,6 +3861,10 @@
               </a:solidFill>
             </a:ln>
           </p:spPr>
+          <p:txBody>
+            <a:bodyPr/>
+            <a:p/>
+          </p:txBody>
         </p:sp>
         <p:sp>
           <p:nvSpPr>
@@ -3959,6 +4047,10 @@
               <a:noFill/>
             </a:ln>
           </p:spPr>
+          <p:txBody>
+            <a:bodyPr/>
+            <a:p/>
+          </p:txBody>
         </p:sp>
         <p:sp>
           <p:nvSpPr>
@@ -3981,6 +4073,10 @@
               <a:noFill/>
             </a:ln>
           </p:spPr>
+          <p:txBody>
+            <a:bodyPr/>
+            <a:p/>
+          </p:txBody>
         </p:sp>
         <p:sp>
           <p:nvSpPr>
@@ -4174,6 +4270,10 @@
               </a:solidFill>
             </a:ln>
           </p:spPr>
+          <p:txBody>
+            <a:bodyPr/>
+            <a:p/>
+          </p:txBody>
         </p:sp>
         <p:sp>
           <p:nvSpPr>
@@ -4196,6 +4296,10 @@
               <a:noFill/>
             </a:ln>
           </p:spPr>
+          <p:txBody>
+            <a:bodyPr/>
+            <a:p/>
+          </p:txBody>
         </p:sp>
         <p:sp>
           <p:nvSpPr>
@@ -4218,6 +4322,10 @@
               <a:noFill/>
             </a:ln>
           </p:spPr>
+          <p:txBody>
+            <a:bodyPr/>
+            <a:p/>
+          </p:txBody>
         </p:sp>
         <p:sp>
           <p:nvSpPr>
@@ -4240,6 +4348,10 @@
               <a:noFill/>
             </a:ln>
           </p:spPr>
+          <p:txBody>
+            <a:bodyPr/>
+            <a:p/>
+          </p:txBody>
         </p:sp>
         <p:sp>
           <p:nvSpPr>
@@ -4262,6 +4374,10 @@
               <a:noFill/>
             </a:ln>
           </p:spPr>
+          <p:txBody>
+            <a:bodyPr/>
+            <a:p/>
+          </p:txBody>
         </p:sp>
         <p:sp>
           <p:nvSpPr>
@@ -4284,6 +4400,10 @@
               <a:noFill/>
             </a:ln>
           </p:spPr>
+          <p:txBody>
+            <a:bodyPr/>
+            <a:p/>
+          </p:txBody>
         </p:sp>
         <p:sp>
           <p:nvSpPr>
@@ -4306,6 +4426,10 @@
               <a:noFill/>
             </a:ln>
           </p:spPr>
+          <p:txBody>
+            <a:bodyPr/>
+            <a:p/>
+          </p:txBody>
         </p:sp>
         <p:sp>
           <p:nvSpPr>
@@ -4328,6 +4452,10 @@
               <a:noFill/>
             </a:ln>
           </p:spPr>
+          <p:txBody>
+            <a:bodyPr/>
+            <a:p/>
+          </p:txBody>
         </p:sp>
         <p:sp>
           <p:nvSpPr>
@@ -4350,6 +4478,10 @@
               <a:noFill/>
             </a:ln>
           </p:spPr>
+          <p:txBody>
+            <a:bodyPr/>
+            <a:p/>
+          </p:txBody>
         </p:sp>
         <p:sp>
           <p:nvSpPr>
@@ -4372,6 +4504,10 @@
               <a:noFill/>
             </a:ln>
           </p:spPr>
+          <p:txBody>
+            <a:bodyPr/>
+            <a:p/>
+          </p:txBody>
         </p:sp>
         <p:sp>
           <p:nvSpPr>
@@ -4394,6 +4530,10 @@
               <a:noFill/>
             </a:ln>
           </p:spPr>
+          <p:txBody>
+            <a:bodyPr/>
+            <a:p/>
+          </p:txBody>
         </p:sp>
         <p:sp>
           <p:nvSpPr>
@@ -4416,6 +4556,10 @@
               <a:noFill/>
             </a:ln>
           </p:spPr>
+          <p:txBody>
+            <a:bodyPr/>
+            <a:p/>
+          </p:txBody>
         </p:sp>
         <p:sp>
           <p:nvSpPr>
@@ -4438,6 +4582,10 @@
               <a:noFill/>
             </a:ln>
           </p:spPr>
+          <p:txBody>
+            <a:bodyPr/>
+            <a:p/>
+          </p:txBody>
         </p:sp>
         <p:sp>
           <p:nvSpPr>
@@ -4609,6 +4757,10 @@
               </a:solidFill>
             </a:ln>
           </p:spPr>
+          <p:txBody>
+            <a:bodyPr/>
+            <a:p/>
+          </p:txBody>
         </p:sp>
         <p:sp>
           <p:nvSpPr>
@@ -4856,6 +5008,10 @@
               </a:solidFill>
             </a:ln>
           </p:spPr>
+          <p:txBody>
+            <a:bodyPr/>
+            <a:p/>
+          </p:txBody>
         </p:sp>
       </p:grpSp>
       <p:grpSp>
@@ -4999,6 +5155,10 @@
               <a:noFill/>
             </a:ln>
           </p:spPr>
+          <p:txBody>
+            <a:bodyPr/>
+            <a:p/>
+          </p:txBody>
         </p:sp>
         <p:sp>
           <p:nvSpPr>
@@ -5021,6 +5181,10 @@
               <a:noFill/>
             </a:ln>
           </p:spPr>
+          <p:txBody>
+            <a:bodyPr/>
+            <a:p/>
+          </p:txBody>
         </p:sp>
         <p:sp>
           <p:nvSpPr>
@@ -5162,6 +5326,10 @@
               </a:solidFill>
             </a:ln>
           </p:spPr>
+          <p:txBody>
+            <a:bodyPr/>
+            <a:p/>
+          </p:txBody>
         </p:sp>
         <p:sp>
           <p:nvSpPr>
@@ -5304,6 +5472,10 @@
               <a:noFill/>
             </a:ln>
           </p:spPr>
+          <p:txBody>
+            <a:bodyPr/>
+            <a:p/>
+          </p:txBody>
         </p:sp>
         <p:sp>
           <p:nvSpPr>
@@ -5326,6 +5498,10 @@
               <a:noFill/>
             </a:ln>
           </p:spPr>
+          <p:txBody>
+            <a:bodyPr/>
+            <a:p/>
+          </p:txBody>
         </p:sp>
         <p:sp>
           <p:nvSpPr>
@@ -5467,6 +5643,10 @@
               </a:solidFill>
             </a:ln>
           </p:spPr>
+          <p:txBody>
+            <a:bodyPr/>
+            <a:p/>
+          </p:txBody>
         </p:sp>
         <p:sp>
           <p:nvSpPr>
@@ -5609,6 +5789,10 @@
               <a:noFill/>
             </a:ln>
           </p:spPr>
+          <p:txBody>
+            <a:bodyPr/>
+            <a:p/>
+          </p:txBody>
         </p:sp>
         <p:sp>
           <p:nvSpPr>
@@ -5631,6 +5815,10 @@
               <a:noFill/>
             </a:ln>
           </p:spPr>
+          <p:txBody>
+            <a:bodyPr/>
+            <a:p/>
+          </p:txBody>
         </p:sp>
         <p:sp>
           <p:nvSpPr>
@@ -5772,6 +5960,10 @@
               </a:solidFill>
             </a:ln>
           </p:spPr>
+          <p:txBody>
+            <a:bodyPr/>
+            <a:p/>
+          </p:txBody>
         </p:sp>
         <p:sp>
           <p:nvSpPr>
@@ -5914,6 +6106,10 @@
               <a:noFill/>
             </a:ln>
           </p:spPr>
+          <p:txBody>
+            <a:bodyPr/>
+            <a:p/>
+          </p:txBody>
         </p:sp>
         <p:sp>
           <p:nvSpPr>
@@ -6067,6 +6263,10 @@
               </a:solidFill>
             </a:ln>
           </p:spPr>
+          <p:txBody>
+            <a:bodyPr/>
+            <a:p/>
+          </p:txBody>
         </p:sp>
         <p:sp>
           <p:nvSpPr>
@@ -6314,6 +6514,10 @@
               </a:solidFill>
             </a:ln>
           </p:spPr>
+          <p:txBody>
+            <a:bodyPr/>
+            <a:p/>
+          </p:txBody>
         </p:sp>
       </p:grpSp>
       <p:grpSp>
@@ -6457,6 +6661,10 @@
               </a:solidFill>
             </a:ln>
           </p:spPr>
+          <p:txBody>
+            <a:bodyPr/>
+            <a:p/>
+          </p:txBody>
         </p:sp>
         <p:sp>
           <p:nvSpPr>
@@ -6536,6 +6744,10 @@
               </a:solidFill>
             </a:ln>
           </p:spPr>
+          <p:txBody>
+            <a:bodyPr/>
+            <a:p/>
+          </p:txBody>
         </p:sp>
         <p:sp>
           <p:nvSpPr>
@@ -6560,6 +6772,10 @@
               </a:solidFill>
             </a:ln>
           </p:spPr>
+          <p:txBody>
+            <a:bodyPr/>
+            <a:p/>
+          </p:txBody>
         </p:sp>
         <p:sp>
           <p:nvSpPr>
@@ -6586,6 +6802,10 @@
               </a:solidFill>
             </a:ln>
           </p:spPr>
+          <p:txBody>
+            <a:bodyPr/>
+            <a:p/>
+          </p:txBody>
         </p:sp>
         <p:sp>
           <p:nvSpPr>
@@ -6797,6 +7017,10 @@
               </a:solidFill>
             </a:ln>
           </p:spPr>
+          <p:txBody>
+            <a:bodyPr/>
+            <a:p/>
+          </p:txBody>
         </p:sp>
         <p:sp>
           <p:nvSpPr>
@@ -6913,6 +7137,10 @@
               </a:solidFill>
             </a:ln>
           </p:spPr>
+          <p:txBody>
+            <a:bodyPr/>
+            <a:p/>
+          </p:txBody>
         </p:sp>
         <p:sp>
           <p:nvSpPr>
@@ -7029,6 +7257,10 @@
               </a:solidFill>
             </a:ln>
           </p:spPr>
+          <p:txBody>
+            <a:bodyPr/>
+            <a:p/>
+          </p:txBody>
         </p:sp>
         <p:sp>
           <p:nvSpPr>
@@ -7148,6 +7380,10 @@
               </a:solidFill>
             </a:ln>
           </p:spPr>
+          <p:txBody>
+            <a:bodyPr/>
+            <a:p/>
+          </p:txBody>
         </p:sp>
         <p:sp>
           <p:nvSpPr>
@@ -7290,6 +7526,10 @@
               </a:solidFill>
             </a:ln>
           </p:spPr>
+          <p:txBody>
+            <a:bodyPr/>
+            <a:p/>
+          </p:txBody>
         </p:sp>
         <p:sp>
           <p:nvSpPr>
@@ -7537,6 +7777,10 @@
               </a:solidFill>
             </a:ln>
           </p:spPr>
+          <p:txBody>
+            <a:bodyPr/>
+            <a:p/>
+          </p:txBody>
         </p:sp>
       </p:grpSp>
       <p:grpSp>
@@ -7682,6 +7926,10 @@
               <a:noFill/>
             </a:ln>
           </p:spPr>
+          <p:txBody>
+            <a:bodyPr/>
+            <a:p/>
+          </p:txBody>
         </p:sp>
         <p:sp>
           <p:nvSpPr>
@@ -7706,6 +7954,10 @@
               <a:noFill/>
             </a:ln>
           </p:spPr>
+          <p:txBody>
+            <a:bodyPr/>
+            <a:p/>
+          </p:txBody>
         </p:sp>
         <p:sp>
           <p:nvSpPr>
@@ -7730,6 +7982,10 @@
               <a:noFill/>
             </a:ln>
           </p:spPr>
+          <p:txBody>
+            <a:bodyPr/>
+            <a:p/>
+          </p:txBody>
         </p:sp>
         <p:sp>
           <p:nvSpPr>
@@ -7752,6 +8008,10 @@
               <a:noFill/>
             </a:ln>
           </p:spPr>
+          <p:txBody>
+            <a:bodyPr/>
+            <a:p/>
+          </p:txBody>
         </p:sp>
         <p:sp>
           <p:nvSpPr>
@@ -8492,6 +8752,10 @@
               <a:noFill/>
             </a:ln>
           </p:spPr>
+          <p:txBody>
+            <a:bodyPr/>
+            <a:p/>
+          </p:txBody>
         </p:sp>
         <p:sp>
           <p:nvSpPr>
@@ -8656,6 +8920,10 @@
               </a:solidFill>
             </a:ln>
           </p:spPr>
+          <p:txBody>
+            <a:bodyPr/>
+            <a:p/>
+          </p:txBody>
         </p:sp>
         <p:sp>
           <p:nvSpPr>
@@ -8903,6 +9171,10 @@
               </a:solidFill>
             </a:ln>
           </p:spPr>
+          <p:txBody>
+            <a:bodyPr/>
+            <a:p/>
+          </p:txBody>
         </p:sp>
       </p:grpSp>
       <p:grpSp>
@@ -9242,6 +9514,10 @@
               </a:solidFill>
             </a:ln>
           </p:spPr>
+          <p:txBody>
+            <a:bodyPr/>
+            <a:p/>
+          </p:txBody>
         </p:sp>
         <p:sp>
           <p:nvSpPr>
@@ -9413,6 +9689,10 @@
                 <a:noFill/>
               </a:ln>
             </p:spPr>
+            <p:txBody>
+              <a:bodyPr/>
+              <a:p/>
+            </p:txBody>
           </p:sp>
           <p:sp>
             <p:nvSpPr>
@@ -9439,6 +9719,10 @@
                 <a:noFill/>
               </a:ln>
             </p:spPr>
+            <p:txBody>
+              <a:bodyPr/>
+              <a:p/>
+            </p:txBody>
           </p:sp>
           <p:sp>
             <p:nvSpPr>
@@ -9465,6 +9749,10 @@
                 <a:noFill/>
               </a:ln>
             </p:spPr>
+            <p:txBody>
+              <a:bodyPr/>
+              <a:p/>
+            </p:txBody>
           </p:sp>
           <p:sp>
             <p:nvSpPr>
@@ -9491,6 +9779,10 @@
                 <a:noFill/>
               </a:ln>
             </p:spPr>
+            <p:txBody>
+              <a:bodyPr/>
+              <a:p/>
+            </p:txBody>
           </p:sp>
         </p:grpSp>
       </p:grpSp>
@@ -9583,6 +9875,10 @@
               </a:solidFill>
             </a:ln>
           </p:spPr>
+          <p:txBody>
+            <a:bodyPr/>
+            <a:p/>
+          </p:txBody>
         </p:sp>
         <p:sp>
           <p:nvSpPr>
@@ -9605,6 +9901,10 @@
               <a:noFill/>
             </a:ln>
           </p:spPr>
+          <p:txBody>
+            <a:bodyPr/>
+            <a:p/>
+          </p:txBody>
         </p:sp>
         <p:sp>
           <p:nvSpPr>
@@ -9721,6 +10021,10 @@
               </a:solidFill>
             </a:ln>
           </p:spPr>
+          <p:txBody>
+            <a:bodyPr/>
+            <a:p/>
+          </p:txBody>
         </p:sp>
         <p:sp>
           <p:nvSpPr>
@@ -9743,6 +10047,10 @@
               <a:noFill/>
             </a:ln>
           </p:spPr>
+          <p:txBody>
+            <a:bodyPr/>
+            <a:p/>
+          </p:txBody>
         </p:sp>
         <p:sp>
           <p:nvSpPr>
@@ -9859,6 +10167,10 @@
               </a:solidFill>
             </a:ln>
           </p:spPr>
+          <p:txBody>
+            <a:bodyPr/>
+            <a:p/>
+          </p:txBody>
         </p:sp>
         <p:sp>
           <p:nvSpPr>
@@ -9881,6 +10193,10 @@
               <a:noFill/>
             </a:ln>
           </p:spPr>
+          <p:txBody>
+            <a:bodyPr/>
+            <a:p/>
+          </p:txBody>
         </p:sp>
         <p:sp>
           <p:nvSpPr>
@@ -9997,6 +10313,10 @@
               </a:solidFill>
             </a:ln>
           </p:spPr>
+          <p:txBody>
+            <a:bodyPr/>
+            <a:p/>
+          </p:txBody>
         </p:sp>
         <p:sp>
           <p:nvSpPr>
@@ -10019,6 +10339,10 @@
               <a:noFill/>
             </a:ln>
           </p:spPr>
+          <p:txBody>
+            <a:bodyPr/>
+            <a:p/>
+          </p:txBody>
         </p:sp>
         <p:sp>
           <p:nvSpPr>
@@ -10135,6 +10459,10 @@
               </a:solidFill>
             </a:ln>
           </p:spPr>
+          <p:txBody>
+            <a:bodyPr/>
+            <a:p/>
+          </p:txBody>
         </p:sp>
       </p:grpSp>
       <p:grpSp>
@@ -10174,6 +10502,10 @@
               </a:solidFill>
             </a:ln>
           </p:spPr>
+          <p:txBody>
+            <a:bodyPr/>
+            <a:p/>
+          </p:txBody>
         </p:sp>
         <p:sp>
           <p:nvSpPr>
@@ -10316,6 +10648,10 @@
               </a:solidFill>
             </a:ln>
           </p:spPr>
+          <p:txBody>
+            <a:bodyPr/>
+            <a:p/>
+          </p:txBody>
         </p:sp>
         <p:sp>
           <p:nvSpPr>
@@ -10563,6 +10899,10 @@
               </a:solidFill>
             </a:ln>
           </p:spPr>
+          <p:txBody>
+            <a:bodyPr/>
+            <a:p/>
+          </p:txBody>
         </p:sp>
       </p:grpSp>
       <p:grpSp>
@@ -10760,6 +11100,10 @@
               </a:solidFill>
             </a:ln>
           </p:spPr>
+          <p:txBody>
+            <a:bodyPr/>
+            <a:p/>
+          </p:txBody>
         </p:sp>
         <p:sp>
           <p:nvSpPr>
@@ -10962,6 +11306,10 @@
               <a:tailEnd type="triangle" w="lg" len="lg"/>
             </a:ln>
           </p:spPr>
+          <p:txBody>
+            <a:bodyPr/>
+            <a:p/>
+          </p:txBody>
         </p:sp>
         <p:sp>
           <p:nvSpPr>
@@ -11120,6 +11468,10 @@
               <a:tailEnd type="triangle" w="lg" len="lg"/>
             </a:ln>
           </p:spPr>
+          <p:txBody>
+            <a:bodyPr/>
+            <a:p/>
+          </p:txBody>
         </p:sp>
         <p:sp>
           <p:nvSpPr>
@@ -11278,6 +11630,10 @@
               <a:tailEnd type="triangle" w="lg" len="lg"/>
             </a:ln>
           </p:spPr>
+          <p:txBody>
+            <a:bodyPr/>
+            <a:p/>
+          </p:txBody>
         </p:sp>
         <p:sp>
           <p:nvSpPr>
@@ -11355,6 +11711,10 @@
               <a:noFill/>
             </a:ln>
           </p:spPr>
+          <p:txBody>
+            <a:bodyPr/>
+            <a:p/>
+          </p:txBody>
         </p:sp>
         <p:sp>
           <p:nvSpPr>
@@ -11458,6 +11818,10 @@
               </a:solidFill>
             </a:ln>
           </p:spPr>
+          <p:txBody>
+            <a:bodyPr/>
+            <a:p/>
+          </p:txBody>
         </p:sp>
         <p:sp>
           <p:nvSpPr>
@@ -11705,6 +12069,10 @@
               </a:solidFill>
             </a:ln>
           </p:spPr>
+          <p:txBody>
+            <a:bodyPr/>
+            <a:p/>
+          </p:txBody>
         </p:sp>
       </p:grpSp>
       <p:grpSp>
@@ -11848,6 +12216,10 @@
               <a:noFill/>
             </a:ln>
           </p:spPr>
+          <p:txBody>
+            <a:bodyPr/>
+            <a:p/>
+          </p:txBody>
         </p:sp>
         <p:sp>
           <p:nvSpPr>
@@ -11964,6 +12336,10 @@
               </a:solidFill>
             </a:ln>
           </p:spPr>
+          <p:txBody>
+            <a:bodyPr/>
+            <a:p/>
+          </p:txBody>
         </p:sp>
         <p:sp>
           <p:nvSpPr>
@@ -12092,6 +12468,10 @@
               <a:noFill/>
             </a:ln>
           </p:spPr>
+          <p:txBody>
+            <a:bodyPr/>
+            <a:p/>
+          </p:txBody>
         </p:sp>
         <p:sp>
           <p:nvSpPr>
@@ -12208,6 +12588,10 @@
               </a:solidFill>
             </a:ln>
           </p:spPr>
+          <p:txBody>
+            <a:bodyPr/>
+            <a:p/>
+          </p:txBody>
         </p:sp>
         <p:sp>
           <p:nvSpPr>
@@ -12244,7 +12628,7 @@
                   <a:ea typeface="+mn-ea"/>
                   <a:cs typeface="+mn-cs"/>
                 </a:rPr>
-                <a:t>laos＝用户态 Agent 内核</a:t>
+                <a:t>laos＝Linux 内核的用户态治理延伸</a:t>
               </a:r>
             </a:p>
           </p:txBody>
@@ -12336,6 +12720,10 @@
               <a:noFill/>
             </a:ln>
           </p:spPr>
+          <p:txBody>
+            <a:bodyPr/>
+            <a:p/>
+          </p:txBody>
         </p:sp>
         <p:sp>
           <p:nvSpPr>
@@ -12452,6 +12840,10 @@
               </a:solidFill>
             </a:ln>
           </p:spPr>
+          <p:txBody>
+            <a:bodyPr/>
+            <a:p/>
+          </p:txBody>
         </p:sp>
         <p:sp>
           <p:nvSpPr>
@@ -12613,6 +13005,10 @@
               <a:noFill/>
             </a:ln>
           </p:spPr>
+          <p:txBody>
+            <a:bodyPr/>
+            <a:p/>
+          </p:txBody>
         </p:sp>
         <p:sp>
           <p:nvSpPr>
@@ -12704,6 +13100,10 @@
               </a:solidFill>
             </a:ln>
           </p:spPr>
+          <p:txBody>
+            <a:bodyPr/>
+            <a:p/>
+          </p:txBody>
         </p:sp>
         <p:sp>
           <p:nvSpPr>
@@ -12951,6 +13351,10 @@
               </a:solidFill>
             </a:ln>
           </p:spPr>
+          <p:txBody>
+            <a:bodyPr/>
+            <a:p/>
+          </p:txBody>
         </p:sp>
       </p:grpSp>
       <p:grpSp>
@@ -13094,6 +13498,10 @@
               <a:noFill/>
             </a:ln>
           </p:spPr>
+          <p:txBody>
+            <a:bodyPr/>
+            <a:p/>
+          </p:txBody>
         </p:sp>
         <p:sp>
           <p:nvSpPr>
@@ -13116,6 +13524,10 @@
               <a:noFill/>
             </a:ln>
           </p:spPr>
+          <p:txBody>
+            <a:bodyPr/>
+            <a:p/>
+          </p:txBody>
         </p:sp>
         <p:sp>
           <p:nvSpPr>
@@ -13348,6 +13760,10 @@
               <a:noFill/>
             </a:ln>
           </p:spPr>
+          <p:txBody>
+            <a:bodyPr/>
+            <a:p/>
+          </p:txBody>
         </p:sp>
         <p:sp>
           <p:nvSpPr>
@@ -13450,6 +13866,10 @@
               <a:noFill/>
             </a:ln>
           </p:spPr>
+          <p:txBody>
+            <a:bodyPr/>
+            <a:p/>
+          </p:txBody>
         </p:sp>
         <p:sp>
           <p:nvSpPr>
@@ -13472,6 +13892,10 @@
               <a:noFill/>
             </a:ln>
           </p:spPr>
+          <p:txBody>
+            <a:bodyPr/>
+            <a:p/>
+          </p:txBody>
         </p:sp>
         <p:sp>
           <p:nvSpPr>
@@ -13704,6 +14128,10 @@
               <a:noFill/>
             </a:ln>
           </p:spPr>
+          <p:txBody>
+            <a:bodyPr/>
+            <a:p/>
+          </p:txBody>
         </p:sp>
         <p:sp>
           <p:nvSpPr>
@@ -13806,6 +14234,10 @@
               <a:noFill/>
             </a:ln>
           </p:spPr>
+          <p:txBody>
+            <a:bodyPr/>
+            <a:p/>
+          </p:txBody>
         </p:sp>
         <p:sp>
           <p:nvSpPr>
@@ -13828,6 +14260,10 @@
               <a:noFill/>
             </a:ln>
           </p:spPr>
+          <p:txBody>
+            <a:bodyPr/>
+            <a:p/>
+          </p:txBody>
         </p:sp>
         <p:sp>
           <p:nvSpPr>
@@ -14060,6 +14496,10 @@
               <a:noFill/>
             </a:ln>
           </p:spPr>
+          <p:txBody>
+            <a:bodyPr/>
+            <a:p/>
+          </p:txBody>
         </p:sp>
         <p:sp>
           <p:nvSpPr>
@@ -14253,6 +14693,10 @@
               </a:solidFill>
             </a:ln>
           </p:spPr>
+          <p:txBody>
+            <a:bodyPr/>
+            <a:p/>
+          </p:txBody>
         </p:sp>
         <p:sp>
           <p:nvSpPr>
@@ -14500,6 +14944,10 @@
               </a:solidFill>
             </a:ln>
           </p:spPr>
+          <p:txBody>
+            <a:bodyPr/>
+            <a:p/>
+          </p:txBody>
         </p:sp>
       </p:grpSp>
       <p:grpSp>
@@ -14643,6 +15091,10 @@
               <a:noFill/>
             </a:ln>
           </p:spPr>
+          <p:txBody>
+            <a:bodyPr/>
+            <a:p/>
+          </p:txBody>
         </p:sp>
         <p:sp>
           <p:nvSpPr>
@@ -14822,6 +15274,10 @@
               <a:noFill/>
             </a:ln>
           </p:spPr>
+          <p:txBody>
+            <a:bodyPr/>
+            <a:p/>
+          </p:txBody>
         </p:sp>
         <p:sp>
           <p:nvSpPr>
@@ -14990,6 +15446,10 @@
               <a:noFill/>
             </a:ln>
           </p:spPr>
+          <p:txBody>
+            <a:bodyPr/>
+            <a:p/>
+          </p:txBody>
         </p:sp>
         <p:sp>
           <p:nvSpPr>
@@ -15238,6 +15698,10 @@
               </a:solidFill>
             </a:ln>
           </p:spPr>
+          <p:txBody>
+            <a:bodyPr/>
+            <a:p/>
+          </p:txBody>
         </p:sp>
         <p:sp>
           <p:nvSpPr>
@@ -15485,6 +15949,10 @@
               </a:solidFill>
             </a:ln>
           </p:spPr>
+          <p:txBody>
+            <a:bodyPr/>
+            <a:p/>
+          </p:txBody>
         </p:sp>
       </p:grpSp>
       <p:grpSp>
@@ -15632,6 +16100,10 @@
               </a:solidFill>
             </a:ln>
           </p:spPr>
+          <p:txBody>
+            <a:bodyPr/>
+            <a:p/>
+          </p:txBody>
         </p:sp>
         <p:sp>
           <p:nvSpPr>
@@ -15734,6 +16206,10 @@
               <a:noFill/>
             </a:ln>
           </p:spPr>
+          <p:txBody>
+            <a:bodyPr/>
+            <a:p/>
+          </p:txBody>
         </p:sp>
         <p:sp>
           <p:nvSpPr>
@@ -15756,6 +16232,10 @@
               <a:noFill/>
             </a:ln>
           </p:spPr>
+          <p:txBody>
+            <a:bodyPr/>
+            <a:p/>
+          </p:txBody>
         </p:sp>
         <p:sp>
           <p:nvSpPr>
@@ -15778,6 +16258,10 @@
               <a:noFill/>
             </a:ln>
           </p:spPr>
+          <p:txBody>
+            <a:bodyPr/>
+            <a:p/>
+          </p:txBody>
         </p:sp>
         <p:sp>
           <p:nvSpPr>
@@ -15804,6 +16288,10 @@
               </a:solidFill>
             </a:ln>
           </p:spPr>
+          <p:txBody>
+            <a:bodyPr/>
+            <a:p/>
+          </p:txBody>
         </p:sp>
         <p:sp>
           <p:nvSpPr>
@@ -15866,6 +16354,10 @@
               <a:noFill/>
             </a:ln>
           </p:spPr>
+          <p:txBody>
+            <a:bodyPr/>
+            <a:p/>
+          </p:txBody>
         </p:sp>
         <p:sp>
           <p:nvSpPr>
@@ -15928,6 +16420,10 @@
               <a:noFill/>
             </a:ln>
           </p:spPr>
+          <p:txBody>
+            <a:bodyPr/>
+            <a:p/>
+          </p:txBody>
         </p:sp>
         <p:sp>
           <p:nvSpPr>
@@ -15990,6 +16486,10 @@
               <a:noFill/>
             </a:ln>
           </p:spPr>
+          <p:txBody>
+            <a:bodyPr/>
+            <a:p/>
+          </p:txBody>
         </p:sp>
         <p:sp>
           <p:nvSpPr>
@@ -16052,6 +16552,10 @@
               <a:noFill/>
             </a:ln>
           </p:spPr>
+          <p:txBody>
+            <a:bodyPr/>
+            <a:p/>
+          </p:txBody>
         </p:sp>
         <p:sp>
           <p:nvSpPr>
@@ -16158,6 +16662,10 @@
               </a:solidFill>
             </a:ln>
           </p:spPr>
+          <p:txBody>
+            <a:bodyPr/>
+            <a:p/>
+          </p:txBody>
         </p:sp>
         <p:sp>
           <p:nvSpPr>
@@ -16264,6 +16772,10 @@
               </a:solidFill>
             </a:ln>
           </p:spPr>
+          <p:txBody>
+            <a:bodyPr/>
+            <a:p/>
+          </p:txBody>
         </p:sp>
         <p:sp>
           <p:nvSpPr>
@@ -16537,6 +17049,10 @@
               </a:solidFill>
             </a:ln>
           </p:spPr>
+          <p:txBody>
+            <a:bodyPr/>
+            <a:p/>
+          </p:txBody>
         </p:sp>
         <p:sp>
           <p:nvSpPr>
@@ -16675,6 +17191,10 @@
               </a:solidFill>
             </a:ln>
           </p:spPr>
+          <p:txBody>
+            <a:bodyPr/>
+            <a:p/>
+          </p:txBody>
         </p:sp>
         <p:sp>
           <p:nvSpPr>
@@ -16814,6 +17334,10 @@
               <a:noFill/>
             </a:ln>
           </p:spPr>
+          <p:txBody>
+            <a:bodyPr/>
+            <a:p/>
+          </p:txBody>
         </p:sp>
         <p:sp>
           <p:nvSpPr>
@@ -16967,6 +17491,10 @@
               </a:solidFill>
             </a:ln>
           </p:spPr>
+          <p:txBody>
+            <a:bodyPr/>
+            <a:p/>
+          </p:txBody>
         </p:sp>
         <p:sp>
           <p:nvSpPr>
@@ -17214,6 +17742,10 @@
               </a:solidFill>
             </a:ln>
           </p:spPr>
+          <p:txBody>
+            <a:bodyPr/>
+            <a:p/>
+          </p:txBody>
         </p:sp>
       </p:grpSp>
       <p:grpSp>
@@ -17369,6 +17901,10 @@
               <a:tailEnd type="triangle" w="lg" len="lg"/>
             </a:ln>
           </p:spPr>
+          <p:txBody>
+            <a:bodyPr/>
+            <a:p/>
+          </p:txBody>
         </p:sp>
         <p:sp>
           <p:nvSpPr>
@@ -17392,6 +17928,10 @@
               <a:tailEnd type="triangle" w="lg" len="lg"/>
             </a:ln>
           </p:spPr>
+          <p:txBody>
+            <a:bodyPr/>
+            <a:p/>
+          </p:txBody>
         </p:sp>
         <p:sp>
           <p:nvSpPr>
@@ -17415,6 +17955,10 @@
               <a:tailEnd type="triangle" w="lg" len="lg"/>
             </a:ln>
           </p:spPr>
+          <p:txBody>
+            <a:bodyPr/>
+            <a:p/>
+          </p:txBody>
         </p:sp>
         <p:sp>
           <p:nvSpPr>
@@ -17438,6 +17982,10 @@
               <a:tailEnd type="triangle" w="lg" len="lg"/>
             </a:ln>
           </p:spPr>
+          <p:txBody>
+            <a:bodyPr/>
+            <a:p/>
+          </p:txBody>
         </p:sp>
         <p:sp>
           <p:nvSpPr>
@@ -17461,6 +18009,10 @@
               <a:tailEnd type="triangle" w="lg" len="lg"/>
             </a:ln>
           </p:spPr>
+          <p:txBody>
+            <a:bodyPr/>
+            <a:p/>
+          </p:txBody>
         </p:sp>
         <p:sp>
           <p:nvSpPr>
@@ -17484,6 +18036,10 @@
               <a:tailEnd type="triangle" w="lg" len="lg"/>
             </a:ln>
           </p:spPr>
+          <p:txBody>
+            <a:bodyPr/>
+            <a:p/>
+          </p:txBody>
         </p:sp>
         <p:sp>
           <p:nvSpPr>
@@ -17507,6 +18063,10 @@
               <a:tailEnd type="triangle" w="lg" len="lg"/>
             </a:ln>
           </p:spPr>
+          <p:txBody>
+            <a:bodyPr/>
+            <a:p/>
+          </p:txBody>
         </p:sp>
         <p:sp>
           <p:nvSpPr>
@@ -17531,6 +18091,10 @@
               </a:solidFill>
             </a:ln>
           </p:spPr>
+          <p:txBody>
+            <a:bodyPr/>
+            <a:p/>
+          </p:txBody>
         </p:sp>
         <p:sp>
           <p:nvSpPr>
@@ -17635,6 +18199,10 @@
               </a:solidFill>
             </a:ln>
           </p:spPr>
+          <p:txBody>
+            <a:bodyPr/>
+            <a:p/>
+          </p:txBody>
         </p:sp>
         <p:sp>
           <p:nvSpPr>
@@ -17739,6 +18307,10 @@
               </a:solidFill>
             </a:ln>
           </p:spPr>
+          <p:txBody>
+            <a:bodyPr/>
+            <a:p/>
+          </p:txBody>
         </p:sp>
         <p:sp>
           <p:nvSpPr>
@@ -17843,6 +18415,10 @@
               </a:solidFill>
             </a:ln>
           </p:spPr>
+          <p:txBody>
+            <a:bodyPr/>
+            <a:p/>
+          </p:txBody>
         </p:sp>
         <p:sp>
           <p:nvSpPr>
@@ -17947,6 +18523,10 @@
               </a:solidFill>
             </a:ln>
           </p:spPr>
+          <p:txBody>
+            <a:bodyPr/>
+            <a:p/>
+          </p:txBody>
         </p:sp>
         <p:sp>
           <p:nvSpPr>
@@ -18051,6 +18631,10 @@
               </a:solidFill>
             </a:ln>
           </p:spPr>
+          <p:txBody>
+            <a:bodyPr/>
+            <a:p/>
+          </p:txBody>
         </p:sp>
         <p:sp>
           <p:nvSpPr>
@@ -18155,6 +18739,10 @@
               </a:solidFill>
             </a:ln>
           </p:spPr>
+          <p:txBody>
+            <a:bodyPr/>
+            <a:p/>
+          </p:txBody>
         </p:sp>
         <p:sp>
           <p:nvSpPr>
@@ -18259,6 +18847,10 @@
               </a:solidFill>
             </a:ln>
           </p:spPr>
+          <p:txBody>
+            <a:bodyPr/>
+            <a:p/>
+          </p:txBody>
         </p:sp>
         <p:sp>
           <p:nvSpPr>
@@ -18376,6 +18968,10 @@
               <a:noFill/>
             </a:ln>
           </p:spPr>
+          <p:txBody>
+            <a:bodyPr/>
+            <a:p/>
+          </p:txBody>
         </p:sp>
         <p:sp>
           <p:nvSpPr>
@@ -18398,6 +18994,10 @@
               <a:noFill/>
             </a:ln>
           </p:spPr>
+          <p:txBody>
+            <a:bodyPr/>
+            <a:p/>
+          </p:txBody>
         </p:sp>
         <p:sp>
           <p:nvSpPr>
@@ -18537,6 +19137,10 @@
               <a:noFill/>
             </a:ln>
           </p:spPr>
+          <p:txBody>
+            <a:bodyPr/>
+            <a:p/>
+          </p:txBody>
         </p:sp>
         <p:sp>
           <p:nvSpPr>
@@ -18681,6 +19285,10 @@
               </a:solidFill>
             </a:ln>
           </p:spPr>
+          <p:txBody>
+            <a:bodyPr/>
+            <a:p/>
+          </p:txBody>
         </p:sp>
         <p:sp>
           <p:nvSpPr>
@@ -18837,6 +19445,10 @@
               </a:solidFill>
             </a:ln>
           </p:spPr>
+          <p:txBody>
+            <a:bodyPr/>
+            <a:p/>
+          </p:txBody>
         </p:sp>
         <p:sp>
           <p:nvSpPr>
@@ -19084,6 +19696,10 @@
               </a:solidFill>
             </a:ln>
           </p:spPr>
+          <p:txBody>
+            <a:bodyPr/>
+            <a:p/>
+          </p:txBody>
         </p:sp>
       </p:grpSp>
       <p:grpSp>
@@ -19278,6 +19894,10 @@
               <a:noFill/>
             </a:ln>
           </p:spPr>
+          <p:txBody>
+            <a:bodyPr/>
+            <a:p/>
+          </p:txBody>
         </p:sp>
         <p:sp>
           <p:nvSpPr>
@@ -19381,6 +20001,10 @@
               <a:tailEnd type="triangle" w="lg" len="lg"/>
             </a:ln>
           </p:spPr>
+          <p:txBody>
+            <a:bodyPr/>
+            <a:p/>
+          </p:txBody>
         </p:sp>
         <p:sp>
           <p:nvSpPr>
@@ -19403,6 +20027,10 @@
               <a:noFill/>
             </a:ln>
           </p:spPr>
+          <p:txBody>
+            <a:bodyPr/>
+            <a:p/>
+          </p:txBody>
         </p:sp>
         <p:sp>
           <p:nvSpPr>
@@ -19546,6 +20174,10 @@
               <a:tailEnd type="triangle" w="lg" len="lg"/>
             </a:ln>
           </p:spPr>
+          <p:txBody>
+            <a:bodyPr/>
+            <a:p/>
+          </p:txBody>
         </p:sp>
         <p:sp>
           <p:nvSpPr>
@@ -19568,6 +20200,10 @@
               <a:noFill/>
             </a:ln>
           </p:spPr>
+          <p:txBody>
+            <a:bodyPr/>
+            <a:p/>
+          </p:txBody>
         </p:sp>
         <p:sp>
           <p:nvSpPr>
@@ -19671,6 +20307,10 @@
               <a:tailEnd type="triangle" w="lg" len="lg"/>
             </a:ln>
           </p:spPr>
+          <p:txBody>
+            <a:bodyPr/>
+            <a:p/>
+          </p:txBody>
         </p:sp>
         <p:sp>
           <p:nvSpPr>
@@ -19693,6 +20333,10 @@
               <a:noFill/>
             </a:ln>
           </p:spPr>
+          <p:txBody>
+            <a:bodyPr/>
+            <a:p/>
+          </p:txBody>
         </p:sp>
         <p:sp>
           <p:nvSpPr>
@@ -19796,6 +20440,10 @@
               <a:tailEnd type="triangle" w="lg" len="lg"/>
             </a:ln>
           </p:spPr>
+          <p:txBody>
+            <a:bodyPr/>
+            <a:p/>
+          </p:txBody>
         </p:sp>
         <p:sp>
           <p:nvSpPr>
@@ -19818,6 +20466,10 @@
               <a:noFill/>
             </a:ln>
           </p:spPr>
+          <p:txBody>
+            <a:bodyPr/>
+            <a:p/>
+          </p:txBody>
         </p:sp>
         <p:sp>
           <p:nvSpPr>
@@ -19921,6 +20573,10 @@
               <a:tailEnd type="triangle" w="lg" len="lg"/>
             </a:ln>
           </p:spPr>
+          <p:txBody>
+            <a:bodyPr/>
+            <a:p/>
+          </p:txBody>
         </p:sp>
         <p:sp>
           <p:nvSpPr>
@@ -19943,6 +20599,10 @@
               <a:noFill/>
             </a:ln>
           </p:spPr>
+          <p:txBody>
+            <a:bodyPr/>
+            <a:p/>
+          </p:txBody>
         </p:sp>
         <p:sp>
           <p:nvSpPr>
@@ -20246,6 +20906,10 @@
               <a:noFill/>
             </a:ln>
           </p:spPr>
+          <p:txBody>
+            <a:bodyPr/>
+            <a:p/>
+          </p:txBody>
         </p:sp>
         <p:sp>
           <p:nvSpPr>
@@ -20348,6 +21012,10 @@
               <a:noFill/>
             </a:ln>
           </p:spPr>
+          <p:txBody>
+            <a:bodyPr/>
+            <a:p/>
+          </p:txBody>
         </p:sp>
         <p:sp>
           <p:nvSpPr>
@@ -20450,6 +21118,10 @@
               <a:noFill/>
             </a:ln>
           </p:spPr>
+          <p:txBody>
+            <a:bodyPr/>
+            <a:p/>
+          </p:txBody>
         </p:sp>
         <p:sp>
           <p:nvSpPr>
@@ -20567,6 +21239,10 @@
               <a:noFill/>
             </a:ln>
           </p:spPr>
+          <p:txBody>
+            <a:bodyPr/>
+            <a:p/>
+          </p:txBody>
         </p:sp>
         <p:sp>
           <p:nvSpPr>
@@ -20589,6 +21265,10 @@
               <a:noFill/>
             </a:ln>
           </p:spPr>
+          <p:txBody>
+            <a:bodyPr/>
+            <a:p/>
+          </p:txBody>
         </p:sp>
         <p:sp>
           <p:nvSpPr>
@@ -20788,6 +21468,10 @@
               </a:solidFill>
             </a:ln>
           </p:spPr>
+          <p:txBody>
+            <a:bodyPr/>
+            <a:p/>
+          </p:txBody>
         </p:sp>
         <p:sp>
           <p:nvSpPr>
@@ -21035,6 +21719,10 @@
               </a:solidFill>
             </a:ln>
           </p:spPr>
+          <p:txBody>
+            <a:bodyPr/>
+            <a:p/>
+          </p:txBody>
         </p:sp>
       </p:grpSp>
       <p:grpSp>
@@ -21232,6 +21920,10 @@
               </a:solidFill>
             </a:ln>
           </p:spPr>
+          <p:txBody>
+            <a:bodyPr/>
+            <a:p/>
+          </p:txBody>
         </p:sp>
         <p:sp>
           <p:nvSpPr>
@@ -21527,6 +22219,10 @@
               </a:solidFill>
             </a:ln>
           </p:spPr>
+          <p:txBody>
+            <a:bodyPr/>
+            <a:p/>
+          </p:txBody>
         </p:sp>
         <p:sp>
           <p:nvSpPr>
@@ -21637,6 +22333,10 @@
               <a:noFill/>
             </a:ln>
           </p:spPr>
+          <p:txBody>
+            <a:bodyPr/>
+            <a:p/>
+          </p:txBody>
         </p:sp>
         <p:sp>
           <p:nvSpPr>
@@ -21790,6 +22490,10 @@
               </a:solidFill>
             </a:ln>
           </p:spPr>
+          <p:txBody>
+            <a:bodyPr/>
+            <a:p/>
+          </p:txBody>
         </p:sp>
         <p:sp>
           <p:nvSpPr>
@@ -22037,6 +22741,10 @@
               </a:solidFill>
             </a:ln>
           </p:spPr>
+          <p:txBody>
+            <a:bodyPr/>
+            <a:p/>
+          </p:txBody>
         </p:sp>
       </p:grpSp>
       <p:grpSp>
@@ -22180,6 +22888,10 @@
               <a:noFill/>
             </a:ln>
           </p:spPr>
+          <p:txBody>
+            <a:bodyPr/>
+            <a:p/>
+          </p:txBody>
         </p:sp>
         <p:sp>
           <p:nvSpPr>
@@ -22216,6 +22928,10 @@
               </a:solidFill>
             </a:ln>
           </p:spPr>
+          <p:txBody>
+            <a:bodyPr/>
+            <a:p/>
+          </p:txBody>
         </p:sp>
         <p:sp>
           <p:nvSpPr>
@@ -22252,6 +22968,10 @@
               </a:solidFill>
             </a:ln>
           </p:spPr>
+          <p:txBody>
+            <a:bodyPr/>
+            <a:p/>
+          </p:txBody>
         </p:sp>
         <p:sp>
           <p:nvSpPr>
@@ -22434,6 +23154,10 @@
               <a:noFill/>
             </a:ln>
           </p:spPr>
+          <p:txBody>
+            <a:bodyPr/>
+            <a:p/>
+          </p:txBody>
         </p:sp>
         <p:sp>
           <p:nvSpPr>
@@ -22536,6 +23260,10 @@
               <a:noFill/>
             </a:ln>
           </p:spPr>
+          <p:txBody>
+            <a:bodyPr/>
+            <a:p/>
+          </p:txBody>
         </p:sp>
         <p:sp>
           <p:nvSpPr>
@@ -22638,6 +23366,10 @@
               <a:noFill/>
             </a:ln>
           </p:spPr>
+          <p:txBody>
+            <a:bodyPr/>
+            <a:p/>
+          </p:txBody>
         </p:sp>
         <p:sp>
           <p:nvSpPr>
@@ -22740,6 +23472,10 @@
               <a:noFill/>
             </a:ln>
           </p:spPr>
+          <p:txBody>
+            <a:bodyPr/>
+            <a:p/>
+          </p:txBody>
         </p:sp>
         <p:sp>
           <p:nvSpPr>
@@ -22951,6 +23687,10 @@
               </a:solidFill>
             </a:ln>
           </p:spPr>
+          <p:txBody>
+            <a:bodyPr/>
+            <a:p/>
+          </p:txBody>
         </p:sp>
         <p:sp>
           <p:nvSpPr>
@@ -23225,6 +23965,10 @@
               <a:noFill/>
             </a:ln>
           </p:spPr>
+          <p:txBody>
+            <a:bodyPr/>
+            <a:p/>
+          </p:txBody>
         </p:sp>
         <p:sp>
           <p:nvSpPr>
@@ -23247,6 +23991,10 @@
               <a:noFill/>
             </a:ln>
           </p:spPr>
+          <p:txBody>
+            <a:bodyPr/>
+            <a:p/>
+          </p:txBody>
         </p:sp>
         <p:sp>
           <p:nvSpPr>
@@ -23389,6 +24137,10 @@
               </a:solidFill>
             </a:ln>
           </p:spPr>
+          <p:txBody>
+            <a:bodyPr/>
+            <a:p/>
+          </p:txBody>
         </p:sp>
         <p:sp>
           <p:nvSpPr>
